--- a/templates/SimpleTemplate.pptx
+++ b/templates/SimpleTemplate.pptx
@@ -229,7 +229,7 @@
           <a:p>
             <a:fld id="{258BFD57-AB0A-470B-A7AF-56DFE7B5174A}" type="datetimeFigureOut">
               <a:rPr lang="en-US" smtClean="0"/>
-              <a:t>11/1/24</a:t>
+              <a:t>4/2/2026</a:t>
             </a:fld>
             <a:endParaRPr lang="en-US" dirty="0"/>
           </a:p>
@@ -406,7 +406,7 @@
           <a:p>
             <a:fld id="{D4B3339F-6CEA-4641-BE08-40DAFD6FCF25}" type="datetimeFigureOut">
               <a:rPr lang="en-US" smtClean="0"/>
-              <a:t>11/1/24</a:t>
+              <a:t>4/2/2026</a:t>
             </a:fld>
             <a:endParaRPr lang="en-US" dirty="0"/>
           </a:p>
@@ -2397,7 +2397,7 @@
 
 <file path=ppt/slideLayouts/slideLayout10.xml><?xml version="1.0" encoding="utf-8"?>
 <p:sldLayout xmlns:a="http://schemas.openxmlformats.org/drawingml/2006/main" xmlns:r="http://schemas.openxmlformats.org/officeDocument/2006/relationships" xmlns:p="http://schemas.openxmlformats.org/presentationml/2006/main" showMasterSp="0" preserve="1" userDrawn="1">
-  <p:cSld name="Title, Picture 0">
+  <p:cSld name="Title, Picture 0,vertical">
     <p:spTree>
       <p:nvGrpSpPr>
         <p:cNvPr id="1" name=""/>
@@ -6154,7 +6154,7 @@
 
 <file path=ppt/slideLayouts/slideLayout3.xml><?xml version="1.0" encoding="utf-8"?>
 <p:sldLayout xmlns:a="http://schemas.openxmlformats.org/drawingml/2006/main" xmlns:r="http://schemas.openxmlformats.org/officeDocument/2006/relationships" xmlns:p="http://schemas.openxmlformats.org/presentationml/2006/main" type="obj" preserve="1">
-  <p:cSld name="Title, Content 0">
+  <p:cSld name="Title, Content 0,vertical">
     <p:spTree>
       <p:nvGrpSpPr>
         <p:cNvPr id="1" name=""/>
@@ -6291,7 +6291,7 @@
 
 <file path=ppt/slideLayouts/slideLayout4.xml><?xml version="1.0" encoding="utf-8"?>
 <p:sldLayout xmlns:a="http://schemas.openxmlformats.org/drawingml/2006/main" xmlns:r="http://schemas.openxmlformats.org/officeDocument/2006/relationships" xmlns:p="http://schemas.openxmlformats.org/presentationml/2006/main" showMasterSp="0" preserve="1" userDrawn="1">
-  <p:cSld name="Title, Content 1">
+  <p:cSld name="Title, Content 1,horizontal">
     <p:spTree>
       <p:nvGrpSpPr>
         <p:cNvPr id="1" name=""/>
@@ -7685,7 +7685,7 @@
 
 <file path=ppt/slideLayouts/slideLayout5.xml><?xml version="1.0" encoding="utf-8"?>
 <p:sldLayout xmlns:a="http://schemas.openxmlformats.org/drawingml/2006/main" xmlns:r="http://schemas.openxmlformats.org/officeDocument/2006/relationships" xmlns:p="http://schemas.openxmlformats.org/presentationml/2006/main" showMasterSp="0" preserve="1" userDrawn="1">
-  <p:cSld name="Title, Content 2">
+  <p:cSld name="Title, Content 2,vertical">
     <p:spTree>
       <p:nvGrpSpPr>
         <p:cNvPr id="1" name=""/>
@@ -9027,7 +9027,7 @@
 
 <file path=ppt/slideLayouts/slideLayout6.xml><?xml version="1.0" encoding="utf-8"?>
 <p:sldLayout xmlns:a="http://schemas.openxmlformats.org/drawingml/2006/main" xmlns:r="http://schemas.openxmlformats.org/officeDocument/2006/relationships" xmlns:p="http://schemas.openxmlformats.org/presentationml/2006/main" showMasterSp="0" preserve="1" userDrawn="1">
-  <p:cSld name="Title, Content 3">
+  <p:cSld name="Title, Content 3,horizontal">
     <p:spTree>
       <p:nvGrpSpPr>
         <p:cNvPr id="1" name=""/>
@@ -10433,7 +10433,7 @@
 
 <file path=ppt/slideLayouts/slideLayout7.xml><?xml version="1.0" encoding="utf-8"?>
 <p:sldLayout xmlns:a="http://schemas.openxmlformats.org/drawingml/2006/main" xmlns:r="http://schemas.openxmlformats.org/officeDocument/2006/relationships" xmlns:p="http://schemas.openxmlformats.org/presentationml/2006/main" showMasterSp="0" preserve="1" userDrawn="1">
-  <p:cSld name="Title, Content, Picture 1">
+  <p:cSld name="Title, Content, Picture 1,horizontal">
     <p:spTree>
       <p:nvGrpSpPr>
         <p:cNvPr id="1" name=""/>
@@ -11852,7 +11852,7 @@
 
 <file path=ppt/slideLayouts/slideLayout8.xml><?xml version="1.0" encoding="utf-8"?>
 <p:sldLayout xmlns:a="http://schemas.openxmlformats.org/drawingml/2006/main" xmlns:r="http://schemas.openxmlformats.org/officeDocument/2006/relationships" xmlns:p="http://schemas.openxmlformats.org/presentationml/2006/main" showMasterSp="0" preserve="1" userDrawn="1">
-  <p:cSld name="Title, Content, Picture 0">
+  <p:cSld name="Title, Content, Picture 0,horizontal">
     <p:spTree>
       <p:nvGrpSpPr>
         <p:cNvPr id="1" name=""/>
@@ -13271,7 +13271,7 @@
 
 <file path=ppt/slideLayouts/slideLayout9.xml><?xml version="1.0" encoding="utf-8"?>
 <p:sldLayout xmlns:a="http://schemas.openxmlformats.org/drawingml/2006/main" xmlns:r="http://schemas.openxmlformats.org/officeDocument/2006/relationships" xmlns:p="http://schemas.openxmlformats.org/presentationml/2006/main" showMasterSp="0" preserve="1" userDrawn="1">
-  <p:cSld name="Title, Content, Picture 2">
+  <p:cSld name="Title, Content, Picture 2,vertical">
     <p:spTree>
       <p:nvGrpSpPr>
         <p:cNvPr id="1" name=""/>
@@ -15975,7 +15975,7 @@
           <a:p>
             <a:fld id="{8F72BA41-EC5B-4197-BCC8-0FD2E523CD7A}" type="datetimeFigureOut">
               <a:rPr lang="en-US" smtClean="0"/>
-              <a:t>11/1/24</a:t>
+              <a:t>4/2/2026</a:t>
             </a:fld>
             <a:endParaRPr lang="en-US" dirty="0"/>
           </a:p>
@@ -17244,6 +17244,15 @@
 </file>
 
 <file path=customXml/item1.xml><?xml version="1.0" encoding="utf-8"?>
+<?mso-contentType ?>
+<FormTemplates xmlns="http://schemas.microsoft.com/sharepoint/v3/contenttype/forms">
+  <Display>DocumentLibraryForm</Display>
+  <Edit>DocumentLibraryForm</Edit>
+  <New>DocumentLibraryForm</New>
+</FormTemplates>
+</file>
+
+<file path=customXml/item2.xml><?xml version="1.0" encoding="utf-8"?>
 <p:properties xmlns:p="http://schemas.microsoft.com/office/2006/metadata/properties" xmlns:xsi="http://www.w3.org/2001/XMLSchema-instance" xmlns:pc="http://schemas.microsoft.com/office/infopath/2007/PartnerControls">
   <documentManagement>
     <_ip_UnifiedCompliancePolicyUIAction xmlns="http://schemas.microsoft.com/sharepoint/v3" xsi:nil="true"/>
@@ -17261,15 +17270,6 @@
     <MediaServiceKeyPoints xmlns="71af3243-3dd4-4a8d-8c0d-dd76da1f02a5" xsi:nil="true"/>
   </documentManagement>
 </p:properties>
-</file>
-
-<file path=customXml/item2.xml><?xml version="1.0" encoding="utf-8"?>
-<?mso-contentType ?>
-<FormTemplates xmlns="http://schemas.microsoft.com/sharepoint/v3/contenttype/forms">
-  <Display>DocumentLibraryForm</Display>
-  <Edit>DocumentLibraryForm</Edit>
-  <New>DocumentLibraryForm</New>
-</FormTemplates>
 </file>
 
 <file path=customXml/item3.xml><?xml version="1.0" encoding="utf-8"?>
@@ -17585,6 +17585,14 @@
 </file>
 
 <file path=customXml/itemProps1.xml><?xml version="1.0" encoding="utf-8"?>
+<ds:datastoreItem xmlns:ds="http://schemas.openxmlformats.org/officeDocument/2006/customXml" ds:itemID="{A78D9019-7CE1-4B77-8F5D-67F6576598CB}">
+  <ds:schemaRefs>
+    <ds:schemaRef ds:uri="http://schemas.microsoft.com/sharepoint/v3/contenttype/forms"/>
+  </ds:schemaRefs>
+</ds:datastoreItem>
+</file>
+
+<file path=customXml/itemProps2.xml><?xml version="1.0" encoding="utf-8"?>
 <ds:datastoreItem xmlns:ds="http://schemas.openxmlformats.org/officeDocument/2006/customXml" ds:itemID="{E42E6C21-1752-4E06-9FE3-208D45ADB668}">
   <ds:schemaRefs>
     <ds:schemaRef ds:uri="http://schemas.microsoft.com/office/2006/metadata/properties"/>
@@ -17592,14 +17600,6 @@
     <ds:schemaRef ds:uri="http://schemas.microsoft.com/sharepoint/v3"/>
     <ds:schemaRef ds:uri="71af3243-3dd4-4a8d-8c0d-dd76da1f02a5"/>
     <ds:schemaRef ds:uri="230e9df3-be65-4c73-a93b-d1236ebd677e"/>
-  </ds:schemaRefs>
-</ds:datastoreItem>
-</file>
-
-<file path=customXml/itemProps2.xml><?xml version="1.0" encoding="utf-8"?>
-<ds:datastoreItem xmlns:ds="http://schemas.openxmlformats.org/officeDocument/2006/customXml" ds:itemID="{A78D9019-7CE1-4B77-8F5D-67F6576598CB}">
-  <ds:schemaRefs>
-    <ds:schemaRef ds:uri="http://schemas.microsoft.com/sharepoint/v3/contenttype/forms"/>
   </ds:schemaRefs>
 </ds:datastoreItem>
 </file>
